--- a/make_presentation/templates/templates/creative/_9.pptx
+++ b/make_presentation/templates/templates/creative/_9.pptx
@@ -75,19 +75,7 @@
               <a:rPr b="0" lang="en-US" sz="4400" spc="-1" strike="noStrike">
                 <a:latin typeface="Arial"/>
               </a:rPr>
-              <a:t>Click to </a:t>
-            </a:r>
-            <a:r>
-              <a:rPr b="0" lang="en-US" sz="4400" spc="-1" strike="noStrike">
-                <a:latin typeface="Arial"/>
-              </a:rPr>
-              <a:t>move </a:t>
-            </a:r>
-            <a:r>
-              <a:rPr b="0" lang="en-US" sz="4400" spc="-1" strike="noStrike">
-                <a:latin typeface="Arial"/>
-              </a:rPr>
-              <a:t>the slide</a:t>
+              <a:t>Click to move the slide</a:t>
             </a:r>
             <a:endParaRPr b="0" lang="en-US" sz="4400" spc="-1" strike="noStrike">
               <a:latin typeface="Arial"/>
@@ -127,13 +115,7 @@
               <a:rPr b="0" lang="en-US" sz="2000" spc="-1" strike="noStrike">
                 <a:latin typeface="Arial"/>
               </a:rPr>
-              <a:t>Click to edit the </a:t>
-            </a:r>
-            <a:r>
-              <a:rPr b="0" lang="en-US" sz="2000" spc="-1" strike="noStrike">
-                <a:latin typeface="Arial"/>
-              </a:rPr>
-              <a:t>notes format</a:t>
+              <a:t>Click to edit the notes format</a:t>
             </a:r>
             <a:endParaRPr b="0" lang="en-US" sz="2000" spc="-1" strike="noStrike">
               <a:latin typeface="Arial"/>
@@ -318,7 +300,7 @@
             <a:pPr algn="r">
               <a:buNone/>
             </a:pPr>
-            <a:fld id="{138DEE30-6679-435D-A912-0823CBF648CC}" type="slidenum">
+            <a:fld id="{E25F2B1D-73C4-4271-BE39-5E0978A0A4A2}" type="slidenum">
               <a:rPr b="0" lang="en-US" sz="1400" spc="-1" strike="noStrike">
                 <a:latin typeface="Times New Roman"/>
               </a:rPr>
@@ -366,7 +348,7 @@
         <p:spPr>
           <a:xfrm>
             <a:off x="685800" y="1143000"/>
-            <a:ext cx="5485680" cy="3085560"/>
+            <a:ext cx="5485320" cy="3085200"/>
           </a:xfrm>
           <a:prstGeom prst="rect">
             <a:avLst/>
@@ -389,7 +371,7 @@
         <p:spPr>
           <a:xfrm>
             <a:off x="685800" y="4400640"/>
-            <a:ext cx="5485680" cy="3599640"/>
+            <a:ext cx="5485320" cy="3599280"/>
           </a:xfrm>
           <a:prstGeom prst="rect">
             <a:avLst/>
@@ -423,7 +405,7 @@
         <p:spPr>
           <a:xfrm>
             <a:off x="3884760" y="8685360"/>
-            <a:ext cx="2971080" cy="457920"/>
+            <a:ext cx="2970720" cy="457560"/>
           </a:xfrm>
           <a:prstGeom prst="rect">
             <a:avLst/>
@@ -455,7 +437,7 @@
               </a:lnSpc>
               <a:buNone/>
             </a:pPr>
-            <a:fld id="{87830BB6-EA92-44E6-91E1-419BEA4C112F}" type="slidenum">
+            <a:fld id="{78EED494-EF5B-44B3-B38B-228C6BCE45B3}" type="slidenum">
               <a:rPr b="0" lang="ru-RU" sz="1200" spc="-1" strike="noStrike">
                 <a:latin typeface="Times New Roman"/>
               </a:rPr>
@@ -502,7 +484,7 @@
         <p:spPr>
           <a:xfrm>
             <a:off x="685800" y="1143000"/>
-            <a:ext cx="5485680" cy="3085560"/>
+            <a:ext cx="5485320" cy="3085200"/>
           </a:xfrm>
           <a:prstGeom prst="rect">
             <a:avLst/>
@@ -525,7 +507,7 @@
         <p:spPr>
           <a:xfrm>
             <a:off x="685800" y="4400640"/>
-            <a:ext cx="5485680" cy="3599640"/>
+            <a:ext cx="5485320" cy="3599280"/>
           </a:xfrm>
           <a:prstGeom prst="rect">
             <a:avLst/>
@@ -559,7 +541,7 @@
         <p:spPr>
           <a:xfrm>
             <a:off x="3884760" y="8685360"/>
-            <a:ext cx="2971080" cy="457920"/>
+            <a:ext cx="2970720" cy="457560"/>
           </a:xfrm>
           <a:prstGeom prst="rect">
             <a:avLst/>
@@ -591,7 +573,7 @@
               </a:lnSpc>
               <a:buNone/>
             </a:pPr>
-            <a:fld id="{BFE05610-7AE7-4F64-B85F-687EA9299AE3}" type="slidenum">
+            <a:fld id="{DE7D9457-AB96-45F6-A8E6-32913FF20AFA}" type="slidenum">
               <a:rPr b="0" lang="ru-RU" sz="1200" spc="-1" strike="noStrike">
                 <a:latin typeface="Times New Roman"/>
               </a:rPr>
@@ -659,7 +641,7 @@
         <p:txBody>
           <a:bodyPr/>
           <a:p>
-            <a:fld id="{8E1BFAFD-E12B-4873-8C47-20A2A31994AD}" type="slidenum">
+            <a:fld id="{0A7C79E4-1528-4258-B11E-3FC8299300EB}" type="slidenum">
               <a:t>&lt;#&gt;</a:t>
             </a:fld>
           </a:p>
@@ -721,7 +703,7 @@
         <p:spPr>
           <a:xfrm>
             <a:off x="1143000" y="841680"/>
-            <a:ext cx="6857280" cy="1789920"/>
+            <a:ext cx="6856920" cy="1789560"/>
           </a:xfrm>
           <a:prstGeom prst="rect">
             <a:avLst/>
@@ -758,7 +740,7 @@
         <p:spPr>
           <a:xfrm>
             <a:off x="457200" y="1203480"/>
-            <a:ext cx="8229240" cy="1422720"/>
+            <a:ext cx="8228880" cy="1422360"/>
           </a:xfrm>
           <a:prstGeom prst="rect">
             <a:avLst/>
@@ -791,8 +773,8 @@
         </p:nvSpPr>
         <p:spPr>
           <a:xfrm>
-            <a:off x="457200" y="2761920"/>
-            <a:ext cx="8229240" cy="1422720"/>
+            <a:off x="457200" y="2761200"/>
+            <a:ext cx="8228880" cy="1422360"/>
           </a:xfrm>
           <a:prstGeom prst="rect">
             <a:avLst/>
@@ -847,7 +829,7 @@
         <p:txBody>
           <a:bodyPr/>
           <a:p>
-            <a:fld id="{CDCEB650-AFE9-470F-BA7A-A1C0F0883D17}" type="slidenum">
+            <a:fld id="{6AF955DD-2501-4418-A0AC-FE7C0EC3AEA7}" type="slidenum">
               <a:t>&lt;#&gt;</a:t>
             </a:fld>
           </a:p>
@@ -909,7 +891,7 @@
         <p:spPr>
           <a:xfrm>
             <a:off x="1143000" y="841680"/>
-            <a:ext cx="6857280" cy="1789920"/>
+            <a:ext cx="6856920" cy="1789560"/>
           </a:xfrm>
           <a:prstGeom prst="rect">
             <a:avLst/>
@@ -946,7 +928,7 @@
         <p:spPr>
           <a:xfrm>
             <a:off x="457200" y="1203480"/>
-            <a:ext cx="4015800" cy="1422720"/>
+            <a:ext cx="4015440" cy="1422360"/>
           </a:xfrm>
           <a:prstGeom prst="rect">
             <a:avLst/>
@@ -979,8 +961,8 @@
         </p:nvSpPr>
         <p:spPr>
           <a:xfrm>
-            <a:off x="4674240" y="1203480"/>
-            <a:ext cx="4015800" cy="1422720"/>
+            <a:off x="4673880" y="1203480"/>
+            <a:ext cx="4015440" cy="1422360"/>
           </a:xfrm>
           <a:prstGeom prst="rect">
             <a:avLst/>
@@ -1013,8 +995,8 @@
         </p:nvSpPr>
         <p:spPr>
           <a:xfrm>
-            <a:off x="457200" y="2761920"/>
-            <a:ext cx="4015800" cy="1422720"/>
+            <a:off x="457200" y="2761200"/>
+            <a:ext cx="4015440" cy="1422360"/>
           </a:xfrm>
           <a:prstGeom prst="rect">
             <a:avLst/>
@@ -1047,8 +1029,8 @@
         </p:nvSpPr>
         <p:spPr>
           <a:xfrm>
-            <a:off x="4674240" y="2761920"/>
-            <a:ext cx="4015800" cy="1422720"/>
+            <a:off x="4673880" y="2761200"/>
+            <a:ext cx="4015440" cy="1422360"/>
           </a:xfrm>
           <a:prstGeom prst="rect">
             <a:avLst/>
@@ -1103,7 +1085,7 @@
         <p:txBody>
           <a:bodyPr/>
           <a:p>
-            <a:fld id="{367933A7-5018-49A1-B9D9-AAE5BCC08A52}" type="slidenum">
+            <a:fld id="{5944D489-0A59-4AB1-9799-67F1B92440C9}" type="slidenum">
               <a:t>&lt;#&gt;</a:t>
             </a:fld>
           </a:p>
@@ -1165,7 +1147,7 @@
         <p:spPr>
           <a:xfrm>
             <a:off x="1143000" y="841680"/>
-            <a:ext cx="6857280" cy="1789920"/>
+            <a:ext cx="6856920" cy="1789560"/>
           </a:xfrm>
           <a:prstGeom prst="rect">
             <a:avLst/>
@@ -1202,7 +1184,7 @@
         <p:spPr>
           <a:xfrm>
             <a:off x="457200" y="1203480"/>
-            <a:ext cx="2649600" cy="1422720"/>
+            <a:ext cx="2649600" cy="1422360"/>
           </a:xfrm>
           <a:prstGeom prst="rect">
             <a:avLst/>
@@ -1236,7 +1218,7 @@
         <p:spPr>
           <a:xfrm>
             <a:off x="3239640" y="1203480"/>
-            <a:ext cx="2649600" cy="1422720"/>
+            <a:ext cx="2649600" cy="1422360"/>
           </a:xfrm>
           <a:prstGeom prst="rect">
             <a:avLst/>
@@ -1270,7 +1252,7 @@
         <p:spPr>
           <a:xfrm>
             <a:off x="6022080" y="1203480"/>
-            <a:ext cx="2649600" cy="1422720"/>
+            <a:ext cx="2649600" cy="1422360"/>
           </a:xfrm>
           <a:prstGeom prst="rect">
             <a:avLst/>
@@ -1303,8 +1285,8 @@
         </p:nvSpPr>
         <p:spPr>
           <a:xfrm>
-            <a:off x="457200" y="2761920"/>
-            <a:ext cx="2649600" cy="1422720"/>
+            <a:off x="457200" y="2761200"/>
+            <a:ext cx="2649600" cy="1422360"/>
           </a:xfrm>
           <a:prstGeom prst="rect">
             <a:avLst/>
@@ -1337,8 +1319,8 @@
         </p:nvSpPr>
         <p:spPr>
           <a:xfrm>
-            <a:off x="3239640" y="2761920"/>
-            <a:ext cx="2649600" cy="1422720"/>
+            <a:off x="3239640" y="2761200"/>
+            <a:ext cx="2649600" cy="1422360"/>
           </a:xfrm>
           <a:prstGeom prst="rect">
             <a:avLst/>
@@ -1371,8 +1353,8 @@
         </p:nvSpPr>
         <p:spPr>
           <a:xfrm>
-            <a:off x="6022080" y="2761920"/>
-            <a:ext cx="2649600" cy="1422720"/>
+            <a:off x="6022080" y="2761200"/>
+            <a:ext cx="2649600" cy="1422360"/>
           </a:xfrm>
           <a:prstGeom prst="rect">
             <a:avLst/>
@@ -1427,7 +1409,7 @@
         <p:txBody>
           <a:bodyPr/>
           <a:p>
-            <a:fld id="{9BE5CE28-8C22-4F40-BD03-B7E3704F5775}" type="slidenum">
+            <a:fld id="{73CEBDAB-9E3C-48BF-8537-36E06B3A5B6E}" type="slidenum">
               <a:t>&lt;#&gt;</a:t>
             </a:fld>
           </a:p>
@@ -1489,7 +1471,7 @@
         <p:spPr>
           <a:xfrm>
             <a:off x="1143000" y="841680"/>
-            <a:ext cx="6857280" cy="1789920"/>
+            <a:ext cx="6856920" cy="1789560"/>
           </a:xfrm>
           <a:prstGeom prst="rect">
             <a:avLst/>
@@ -1526,7 +1508,7 @@
         <p:spPr>
           <a:xfrm>
             <a:off x="457200" y="1203480"/>
-            <a:ext cx="8229240" cy="2982960"/>
+            <a:ext cx="8228880" cy="2982600"/>
           </a:xfrm>
           <a:prstGeom prst="rect">
             <a:avLst/>
@@ -1584,7 +1566,7 @@
         <p:txBody>
           <a:bodyPr/>
           <a:p>
-            <a:fld id="{A65E5AE6-6683-4367-82D3-30D7536DD624}" type="slidenum">
+            <a:fld id="{671E6F70-7E63-4CCE-82EA-C43390D82982}" type="slidenum">
               <a:t>&lt;#&gt;</a:t>
             </a:fld>
           </a:p>
@@ -1646,7 +1628,7 @@
         <p:spPr>
           <a:xfrm>
             <a:off x="1143000" y="841680"/>
-            <a:ext cx="6857280" cy="1789920"/>
+            <a:ext cx="6856920" cy="1789560"/>
           </a:xfrm>
           <a:prstGeom prst="rect">
             <a:avLst/>
@@ -1683,7 +1665,7 @@
         <p:spPr>
           <a:xfrm>
             <a:off x="457200" y="1203480"/>
-            <a:ext cx="8229240" cy="2982960"/>
+            <a:ext cx="8228880" cy="2982600"/>
           </a:xfrm>
           <a:prstGeom prst="rect">
             <a:avLst/>
@@ -1738,7 +1720,7 @@
         <p:txBody>
           <a:bodyPr/>
           <a:p>
-            <a:fld id="{BD6EB095-346B-494B-9003-FF1D18CD6BDB}" type="slidenum">
+            <a:fld id="{66AE938A-AD72-442D-BCF1-DB47816E6F9A}" type="slidenum">
               <a:t>&lt;#&gt;</a:t>
             </a:fld>
           </a:p>
@@ -1800,7 +1782,7 @@
         <p:spPr>
           <a:xfrm>
             <a:off x="1143000" y="841680"/>
-            <a:ext cx="6857280" cy="1789920"/>
+            <a:ext cx="6856920" cy="1789560"/>
           </a:xfrm>
           <a:prstGeom prst="rect">
             <a:avLst/>
@@ -1837,7 +1819,7 @@
         <p:spPr>
           <a:xfrm>
             <a:off x="457200" y="1203480"/>
-            <a:ext cx="4015800" cy="2982960"/>
+            <a:ext cx="4015440" cy="2982600"/>
           </a:xfrm>
           <a:prstGeom prst="rect">
             <a:avLst/>
@@ -1870,8 +1852,8 @@
         </p:nvSpPr>
         <p:spPr>
           <a:xfrm>
-            <a:off x="4674240" y="1203480"/>
-            <a:ext cx="4015800" cy="2982960"/>
+            <a:off x="4673880" y="1203480"/>
+            <a:ext cx="4015440" cy="2982600"/>
           </a:xfrm>
           <a:prstGeom prst="rect">
             <a:avLst/>
@@ -1926,7 +1908,7 @@
         <p:txBody>
           <a:bodyPr/>
           <a:p>
-            <a:fld id="{E46B4233-B021-45EB-81D0-4DFCDB6C866A}" type="slidenum">
+            <a:fld id="{173EC562-955F-4E2A-AAE7-97DEFDEDA964}" type="slidenum">
               <a:t>&lt;#&gt;</a:t>
             </a:fld>
           </a:p>
@@ -1988,7 +1970,7 @@
         <p:spPr>
           <a:xfrm>
             <a:off x="1143000" y="841680"/>
-            <a:ext cx="6857280" cy="1789920"/>
+            <a:ext cx="6856920" cy="1789560"/>
           </a:xfrm>
           <a:prstGeom prst="rect">
             <a:avLst/>
@@ -2046,7 +2028,7 @@
         <p:txBody>
           <a:bodyPr/>
           <a:p>
-            <a:fld id="{CC0F2B5D-CDF0-4896-8C4C-AB23392D61D1}" type="slidenum">
+            <a:fld id="{788FB1F5-41B1-4A1B-9AC0-56884845511C}" type="slidenum">
               <a:t>&lt;#&gt;</a:t>
             </a:fld>
           </a:p>
@@ -2108,7 +2090,7 @@
         <p:spPr>
           <a:xfrm>
             <a:off x="1143000" y="841680"/>
-            <a:ext cx="6857280" cy="8298360"/>
+            <a:ext cx="6856920" cy="8296560"/>
           </a:xfrm>
           <a:prstGeom prst="rect">
             <a:avLst/>
@@ -2166,7 +2148,7 @@
         <p:txBody>
           <a:bodyPr/>
           <a:p>
-            <a:fld id="{B19C6228-C4E3-4D8B-857D-47A36E1BC17F}" type="slidenum">
+            <a:fld id="{FBC40B1C-B0FF-4634-A257-F613B957CBF9}" type="slidenum">
               <a:t>&lt;#&gt;</a:t>
             </a:fld>
           </a:p>
@@ -2228,7 +2210,7 @@
         <p:spPr>
           <a:xfrm>
             <a:off x="1143000" y="841680"/>
-            <a:ext cx="6857280" cy="1789920"/>
+            <a:ext cx="6856920" cy="1789560"/>
           </a:xfrm>
           <a:prstGeom prst="rect">
             <a:avLst/>
@@ -2265,7 +2247,7 @@
         <p:spPr>
           <a:xfrm>
             <a:off x="457200" y="1203480"/>
-            <a:ext cx="4015800" cy="1422720"/>
+            <a:ext cx="4015440" cy="1422360"/>
           </a:xfrm>
           <a:prstGeom prst="rect">
             <a:avLst/>
@@ -2298,8 +2280,8 @@
         </p:nvSpPr>
         <p:spPr>
           <a:xfrm>
-            <a:off x="4674240" y="1203480"/>
-            <a:ext cx="4015800" cy="2982960"/>
+            <a:off x="4673880" y="1203480"/>
+            <a:ext cx="4015440" cy="2982600"/>
           </a:xfrm>
           <a:prstGeom prst="rect">
             <a:avLst/>
@@ -2332,8 +2314,8 @@
         </p:nvSpPr>
         <p:spPr>
           <a:xfrm>
-            <a:off x="457200" y="2761920"/>
-            <a:ext cx="4015800" cy="1422720"/>
+            <a:off x="457200" y="2761200"/>
+            <a:ext cx="4015440" cy="1422360"/>
           </a:xfrm>
           <a:prstGeom prst="rect">
             <a:avLst/>
@@ -2388,7 +2370,7 @@
         <p:txBody>
           <a:bodyPr/>
           <a:p>
-            <a:fld id="{2CD00512-D7FC-4978-A511-031D3BAF293B}" type="slidenum">
+            <a:fld id="{A04E5665-7A25-47E6-BE0F-F9CA16309341}" type="slidenum">
               <a:t>&lt;#&gt;</a:t>
             </a:fld>
           </a:p>
@@ -2450,7 +2432,7 @@
         <p:spPr>
           <a:xfrm>
             <a:off x="1143000" y="841680"/>
-            <a:ext cx="6857280" cy="1789920"/>
+            <a:ext cx="6856920" cy="1789560"/>
           </a:xfrm>
           <a:prstGeom prst="rect">
             <a:avLst/>
@@ -2487,7 +2469,7 @@
         <p:spPr>
           <a:xfrm>
             <a:off x="457200" y="1203480"/>
-            <a:ext cx="4015800" cy="2982960"/>
+            <a:ext cx="4015440" cy="2982600"/>
           </a:xfrm>
           <a:prstGeom prst="rect">
             <a:avLst/>
@@ -2520,8 +2502,8 @@
         </p:nvSpPr>
         <p:spPr>
           <a:xfrm>
-            <a:off x="4674240" y="1203480"/>
-            <a:ext cx="4015800" cy="1422720"/>
+            <a:off x="4673880" y="1203480"/>
+            <a:ext cx="4015440" cy="1422360"/>
           </a:xfrm>
           <a:prstGeom prst="rect">
             <a:avLst/>
@@ -2554,8 +2536,8 @@
         </p:nvSpPr>
         <p:spPr>
           <a:xfrm>
-            <a:off x="4674240" y="2761920"/>
-            <a:ext cx="4015800" cy="1422720"/>
+            <a:off x="4673880" y="2761200"/>
+            <a:ext cx="4015440" cy="1422360"/>
           </a:xfrm>
           <a:prstGeom prst="rect">
             <a:avLst/>
@@ -2610,7 +2592,7 @@
         <p:txBody>
           <a:bodyPr/>
           <a:p>
-            <a:fld id="{F642169A-C615-459B-B251-4563E04F36E4}" type="slidenum">
+            <a:fld id="{F092D345-8A3D-424C-B569-C3EB1E01C108}" type="slidenum">
               <a:t>&lt;#&gt;</a:t>
             </a:fld>
           </a:p>
@@ -2672,7 +2654,7 @@
         <p:spPr>
           <a:xfrm>
             <a:off x="1143000" y="841680"/>
-            <a:ext cx="6857280" cy="1789920"/>
+            <a:ext cx="6856920" cy="1789560"/>
           </a:xfrm>
           <a:prstGeom prst="rect">
             <a:avLst/>
@@ -2709,7 +2691,7 @@
         <p:spPr>
           <a:xfrm>
             <a:off x="457200" y="1203480"/>
-            <a:ext cx="4015800" cy="1422720"/>
+            <a:ext cx="4015440" cy="1422360"/>
           </a:xfrm>
           <a:prstGeom prst="rect">
             <a:avLst/>
@@ -2742,8 +2724,8 @@
         </p:nvSpPr>
         <p:spPr>
           <a:xfrm>
-            <a:off x="4674240" y="1203480"/>
-            <a:ext cx="4015800" cy="1422720"/>
+            <a:off x="4673880" y="1203480"/>
+            <a:ext cx="4015440" cy="1422360"/>
           </a:xfrm>
           <a:prstGeom prst="rect">
             <a:avLst/>
@@ -2776,8 +2758,8 @@
         </p:nvSpPr>
         <p:spPr>
           <a:xfrm>
-            <a:off x="457200" y="2761920"/>
-            <a:ext cx="8229240" cy="1422720"/>
+            <a:off x="457200" y="2761200"/>
+            <a:ext cx="8228880" cy="1422360"/>
           </a:xfrm>
           <a:prstGeom prst="rect">
             <a:avLst/>
@@ -2832,7 +2814,7 @@
         <p:txBody>
           <a:bodyPr/>
           <a:p>
-            <a:fld id="{E5A6DA5F-67A6-423A-98BF-E1E02F34F37A}" type="slidenum">
+            <a:fld id="{F9921C78-7F5D-4E28-BE1D-4B73258389B7}" type="slidenum">
               <a:t>&lt;#&gt;</a:t>
             </a:fld>
           </a:p>
@@ -2901,7 +2883,7 @@
         <p:spPr>
           <a:xfrm>
             <a:off x="1143000" y="841680"/>
-            <a:ext cx="6857280" cy="1789920"/>
+            <a:ext cx="6856920" cy="1789560"/>
           </a:xfrm>
           <a:prstGeom prst="rect">
             <a:avLst/>
@@ -2931,173 +2913,6 @@
       <p:sp>
         <p:nvSpPr>
           <p:cNvPr id="1" name="PlaceHolder 2"/>
-          <p:cNvSpPr>
-            <a:spLocks noGrp="1"/>
-          </p:cNvSpPr>
-          <p:nvPr>
-            <p:ph type="ftr" idx="1"/>
-          </p:nvPr>
-        </p:nvSpPr>
-        <p:spPr>
-          <a:xfrm>
-            <a:off x="3029040" y="4767120"/>
-            <a:ext cx="3085560" cy="273240"/>
-          </a:xfrm>
-          <a:prstGeom prst="rect">
-            <a:avLst/>
-          </a:prstGeom>
-          <a:noFill/>
-          <a:ln w="0">
-            <a:noFill/>
-          </a:ln>
-        </p:spPr>
-        <p:txBody>
-          <a:bodyPr lIns="90000" rIns="90000" tIns="45000" bIns="45000" anchor="ctr">
-            <a:noAutofit/>
-          </a:bodyPr>
-          <a:lstStyle>
-            <a:lvl1pPr algn="ctr">
-              <a:lnSpc>
-                <a:spcPct val="100000"/>
-              </a:lnSpc>
-              <a:buNone/>
-              <a:defRPr b="0" lang="en-US" sz="1400" spc="-1" strike="noStrike">
-                <a:latin typeface="Times New Roman"/>
-              </a:defRPr>
-            </a:lvl1pPr>
-          </a:lstStyle>
-          <a:p>
-            <a:pPr algn="ctr">
-              <a:lnSpc>
-                <a:spcPct val="100000"/>
-              </a:lnSpc>
-              <a:buNone/>
-            </a:pPr>
-            <a:r>
-              <a:rPr b="0" lang="en-US" sz="1400" spc="-1" strike="noStrike">
-                <a:latin typeface="Times New Roman"/>
-              </a:rPr>
-              <a:t>&lt;footer&gt;</a:t>
-            </a:r>
-            <a:endParaRPr b="0" lang="en-US" sz="1400" spc="-1" strike="noStrike">
-              <a:latin typeface="Times New Roman"/>
-            </a:endParaRPr>
-          </a:p>
-        </p:txBody>
-      </p:sp>
-      <p:sp>
-        <p:nvSpPr>
-          <p:cNvPr id="2" name="PlaceHolder 3"/>
-          <p:cNvSpPr>
-            <a:spLocks noGrp="1"/>
-          </p:cNvSpPr>
-          <p:nvPr>
-            <p:ph type="sldNum" idx="2"/>
-          </p:nvPr>
-        </p:nvSpPr>
-        <p:spPr>
-          <a:xfrm>
-            <a:off x="6458040" y="4767120"/>
-            <a:ext cx="2056680" cy="273240"/>
-          </a:xfrm>
-          <a:prstGeom prst="rect">
-            <a:avLst/>
-          </a:prstGeom>
-          <a:noFill/>
-          <a:ln w="0">
-            <a:noFill/>
-          </a:ln>
-        </p:spPr>
-        <p:txBody>
-          <a:bodyPr lIns="90000" rIns="90000" tIns="45000" bIns="45000" anchor="ctr">
-            <a:noAutofit/>
-          </a:bodyPr>
-          <a:lstStyle>
-            <a:lvl1pPr algn="r">
-              <a:lnSpc>
-                <a:spcPct val="100000"/>
-              </a:lnSpc>
-              <a:buNone/>
-              <a:defRPr b="0" lang="en-US" sz="900" spc="-1" strike="noStrike">
-                <a:solidFill>
-                  <a:srgbClr val="8b8b8b"/>
-                </a:solidFill>
-                <a:latin typeface="Calibri"/>
-              </a:defRPr>
-            </a:lvl1pPr>
-          </a:lstStyle>
-          <a:p>
-            <a:pPr algn="r">
-              <a:lnSpc>
-                <a:spcPct val="100000"/>
-              </a:lnSpc>
-              <a:buNone/>
-            </a:pPr>
-            <a:fld id="{F58E2905-4017-47F7-A52B-32C851710922}" type="slidenum">
-              <a:rPr b="0" lang="en-US" sz="900" spc="-1" strike="noStrike">
-                <a:solidFill>
-                  <a:srgbClr val="8b8b8b"/>
-                </a:solidFill>
-                <a:latin typeface="Calibri"/>
-              </a:rPr>
-              <a:t>&lt;number&gt;</a:t>
-            </a:fld>
-            <a:endParaRPr b="0" lang="en-US" sz="900" spc="-1" strike="noStrike">
-              <a:latin typeface="Times New Roman"/>
-            </a:endParaRPr>
-          </a:p>
-        </p:txBody>
-      </p:sp>
-      <p:sp>
-        <p:nvSpPr>
-          <p:cNvPr id="3" name="PlaceHolder 4"/>
-          <p:cNvSpPr>
-            <a:spLocks noGrp="1"/>
-          </p:cNvSpPr>
-          <p:nvPr>
-            <p:ph type="dt" idx="3"/>
-          </p:nvPr>
-        </p:nvSpPr>
-        <p:spPr>
-          <a:xfrm>
-            <a:off x="628560" y="4767120"/>
-            <a:ext cx="2056680" cy="273240"/>
-          </a:xfrm>
-          <a:prstGeom prst="rect">
-            <a:avLst/>
-          </a:prstGeom>
-          <a:noFill/>
-          <a:ln w="0">
-            <a:noFill/>
-          </a:ln>
-        </p:spPr>
-        <p:txBody>
-          <a:bodyPr lIns="90000" rIns="90000" tIns="45000" bIns="45000" anchor="ctr">
-            <a:noAutofit/>
-          </a:bodyPr>
-          <a:lstStyle>
-            <a:lvl1pPr>
-              <a:defRPr b="0" lang="en-US" sz="1400" spc="-1" strike="noStrike">
-                <a:latin typeface="Times New Roman"/>
-              </a:defRPr>
-            </a:lvl1pPr>
-          </a:lstStyle>
-          <a:p>
-            <a:r>
-              <a:rPr b="0" lang="en-US" sz="1400" spc="-1" strike="noStrike">
-                <a:latin typeface="Times New Roman"/>
-              </a:rPr>
-              <a:t>&lt;date/time&gt;</a:t>
-            </a:r>
-            <a:endParaRPr b="0" lang="en-US" sz="1400" spc="-1" strike="noStrike">
-              <a:latin typeface="Times New Roman"/>
-            </a:endParaRPr>
-          </a:p>
-        </p:txBody>
-      </p:sp>
-      <p:sp>
-        <p:nvSpPr>
-          <p:cNvPr id="4" name="PlaceHolder 5"/>
           <p:cNvSpPr>
             <a:spLocks noGrp="1"/>
           </p:cNvSpPr>
@@ -3108,7 +2923,7 @@
         <p:spPr>
           <a:xfrm>
             <a:off x="457200" y="1203480"/>
-            <a:ext cx="8229240" cy="2982960"/>
+            <a:ext cx="8228880" cy="2982600"/>
           </a:xfrm>
           <a:prstGeom prst="rect">
             <a:avLst/>
@@ -3135,12 +2950,12 @@
               <a:buChar char=""/>
             </a:pPr>
             <a:r>
-              <a:rPr b="0" lang="en-US" sz="3200" spc="-1" strike="noStrike">
+              <a:rPr b="0" lang="en-US" sz="1800" spc="-1" strike="noStrike">
                 <a:latin typeface="Arial"/>
               </a:rPr>
               <a:t>Click to edit the outline text format</a:t>
             </a:r>
-            <a:endParaRPr b="0" lang="en-US" sz="3200" spc="-1" strike="noStrike">
+            <a:endParaRPr b="0" lang="en-US" sz="1800" spc="-1" strike="noStrike">
               <a:latin typeface="Arial"/>
             </a:endParaRPr>
           </a:p>
@@ -3157,12 +2972,12 @@
               <a:buChar char=""/>
             </a:pPr>
             <a:r>
-              <a:rPr b="0" lang="en-US" sz="2800" spc="-1" strike="noStrike">
+              <a:rPr b="0" lang="en-US" sz="1800" spc="-1" strike="noStrike">
                 <a:latin typeface="Arial"/>
               </a:rPr>
               <a:t>Second Outline Level</a:t>
             </a:r>
-            <a:endParaRPr b="0" lang="en-US" sz="2800" spc="-1" strike="noStrike">
+            <a:endParaRPr b="0" lang="en-US" sz="1800" spc="-1" strike="noStrike">
               <a:latin typeface="Arial"/>
             </a:endParaRPr>
           </a:p>
@@ -3179,12 +2994,12 @@
               <a:buChar char=""/>
             </a:pPr>
             <a:r>
-              <a:rPr b="0" lang="en-US" sz="2400" spc="-1" strike="noStrike">
+              <a:rPr b="0" lang="en-US" sz="1800" spc="-1" strike="noStrike">
                 <a:latin typeface="Arial"/>
               </a:rPr>
               <a:t>Third Outline Level</a:t>
             </a:r>
-            <a:endParaRPr b="0" lang="en-US" sz="2400" spc="-1" strike="noStrike">
+            <a:endParaRPr b="0" lang="en-US" sz="1800" spc="-1" strike="noStrike">
               <a:latin typeface="Arial"/>
             </a:endParaRPr>
           </a:p>
@@ -3201,12 +3016,12 @@
               <a:buChar char=""/>
             </a:pPr>
             <a:r>
-              <a:rPr b="0" lang="en-US" sz="2000" spc="-1" strike="noStrike">
+              <a:rPr b="0" lang="en-US" sz="1800" spc="-1" strike="noStrike">
                 <a:latin typeface="Arial"/>
               </a:rPr>
               <a:t>Fourth Outline Level</a:t>
             </a:r>
-            <a:endParaRPr b="0" lang="en-US" sz="2000" spc="-1" strike="noStrike">
+            <a:endParaRPr b="0" lang="en-US" sz="1800" spc="-1" strike="noStrike">
               <a:latin typeface="Arial"/>
             </a:endParaRPr>
           </a:p>
@@ -3223,12 +3038,12 @@
               <a:buChar char=""/>
             </a:pPr>
             <a:r>
-              <a:rPr b="0" lang="en-US" sz="2000" spc="-1" strike="noStrike">
+              <a:rPr b="0" lang="en-US" sz="1800" spc="-1" strike="noStrike">
                 <a:latin typeface="Arial"/>
               </a:rPr>
               <a:t>Fifth Outline Level</a:t>
             </a:r>
-            <a:endParaRPr b="0" lang="en-US" sz="2000" spc="-1" strike="noStrike">
+            <a:endParaRPr b="0" lang="en-US" sz="1800" spc="-1" strike="noStrike">
               <a:latin typeface="Arial"/>
             </a:endParaRPr>
           </a:p>
@@ -3245,12 +3060,12 @@
               <a:buChar char=""/>
             </a:pPr>
             <a:r>
-              <a:rPr b="0" lang="en-US" sz="2000" spc="-1" strike="noStrike">
+              <a:rPr b="0" lang="en-US" sz="1800" spc="-1" strike="noStrike">
                 <a:latin typeface="Arial"/>
               </a:rPr>
               <a:t>Sixth Outline Level</a:t>
             </a:r>
-            <a:endParaRPr b="0" lang="en-US" sz="2000" spc="-1" strike="noStrike">
+            <a:endParaRPr b="0" lang="en-US" sz="1800" spc="-1" strike="noStrike">
               <a:latin typeface="Arial"/>
             </a:endParaRPr>
           </a:p>
@@ -3267,13 +3082,180 @@
               <a:buChar char=""/>
             </a:pPr>
             <a:r>
-              <a:rPr b="0" lang="en-US" sz="2000" spc="-1" strike="noStrike">
+              <a:rPr b="0" lang="en-US" sz="1800" spc="-1" strike="noStrike">
                 <a:latin typeface="Arial"/>
               </a:rPr>
               <a:t>Seventh Outline Level</a:t>
             </a:r>
-            <a:endParaRPr b="0" lang="en-US" sz="2000" spc="-1" strike="noStrike">
-              <a:latin typeface="Arial"/>
+            <a:endParaRPr b="0" lang="en-US" sz="1800" spc="-1" strike="noStrike">
+              <a:latin typeface="Arial"/>
+            </a:endParaRPr>
+          </a:p>
+        </p:txBody>
+      </p:sp>
+      <p:sp>
+        <p:nvSpPr>
+          <p:cNvPr id="2" name="PlaceHolder 3"/>
+          <p:cNvSpPr>
+            <a:spLocks noGrp="1"/>
+          </p:cNvSpPr>
+          <p:nvPr>
+            <p:ph type="ftr" idx="1"/>
+          </p:nvPr>
+        </p:nvSpPr>
+        <p:spPr>
+          <a:xfrm>
+            <a:off x="3029040" y="4767120"/>
+            <a:ext cx="3085200" cy="272880"/>
+          </a:xfrm>
+          <a:prstGeom prst="rect">
+            <a:avLst/>
+          </a:prstGeom>
+          <a:noFill/>
+          <a:ln w="0">
+            <a:noFill/>
+          </a:ln>
+        </p:spPr>
+        <p:txBody>
+          <a:bodyPr lIns="90000" rIns="90000" tIns="45000" bIns="45000" anchor="ctr">
+            <a:noAutofit/>
+          </a:bodyPr>
+          <a:lstStyle>
+            <a:lvl1pPr algn="ctr">
+              <a:lnSpc>
+                <a:spcPct val="100000"/>
+              </a:lnSpc>
+              <a:buNone/>
+              <a:defRPr b="0" lang="en-US" sz="1400" spc="-1" strike="noStrike">
+                <a:latin typeface="Times New Roman"/>
+              </a:defRPr>
+            </a:lvl1pPr>
+          </a:lstStyle>
+          <a:p>
+            <a:pPr algn="ctr">
+              <a:lnSpc>
+                <a:spcPct val="100000"/>
+              </a:lnSpc>
+              <a:buNone/>
+            </a:pPr>
+            <a:r>
+              <a:rPr b="0" lang="en-US" sz="1400" spc="-1" strike="noStrike">
+                <a:latin typeface="Times New Roman"/>
+              </a:rPr>
+              <a:t>&lt;footer&gt;</a:t>
+            </a:r>
+            <a:endParaRPr b="0" lang="en-US" sz="1400" spc="-1" strike="noStrike">
+              <a:latin typeface="Times New Roman"/>
+            </a:endParaRPr>
+          </a:p>
+        </p:txBody>
+      </p:sp>
+      <p:sp>
+        <p:nvSpPr>
+          <p:cNvPr id="3" name="PlaceHolder 4"/>
+          <p:cNvSpPr>
+            <a:spLocks noGrp="1"/>
+          </p:cNvSpPr>
+          <p:nvPr>
+            <p:ph type="sldNum" idx="2"/>
+          </p:nvPr>
+        </p:nvSpPr>
+        <p:spPr>
+          <a:xfrm>
+            <a:off x="6458040" y="4767120"/>
+            <a:ext cx="2056320" cy="272880"/>
+          </a:xfrm>
+          <a:prstGeom prst="rect">
+            <a:avLst/>
+          </a:prstGeom>
+          <a:noFill/>
+          <a:ln w="0">
+            <a:noFill/>
+          </a:ln>
+        </p:spPr>
+        <p:txBody>
+          <a:bodyPr lIns="90000" rIns="90000" tIns="45000" bIns="45000" anchor="ctr">
+            <a:noAutofit/>
+          </a:bodyPr>
+          <a:lstStyle>
+            <a:lvl1pPr algn="r">
+              <a:lnSpc>
+                <a:spcPct val="100000"/>
+              </a:lnSpc>
+              <a:buNone/>
+              <a:defRPr b="0" lang="en-US" sz="900" spc="-1" strike="noStrike">
+                <a:solidFill>
+                  <a:srgbClr val="8b8b8b"/>
+                </a:solidFill>
+                <a:latin typeface="Calibri"/>
+              </a:defRPr>
+            </a:lvl1pPr>
+          </a:lstStyle>
+          <a:p>
+            <a:pPr algn="r">
+              <a:lnSpc>
+                <a:spcPct val="100000"/>
+              </a:lnSpc>
+              <a:buNone/>
+            </a:pPr>
+            <a:fld id="{5AAD8681-9EEE-4C5B-B7A7-ECF8594CFF1E}" type="slidenum">
+              <a:rPr b="0" lang="en-US" sz="900" spc="-1" strike="noStrike">
+                <a:solidFill>
+                  <a:srgbClr val="8b8b8b"/>
+                </a:solidFill>
+                <a:latin typeface="Calibri"/>
+              </a:rPr>
+              <a:t>&lt;number&gt;</a:t>
+            </a:fld>
+            <a:endParaRPr b="0" lang="en-US" sz="900" spc="-1" strike="noStrike">
+              <a:latin typeface="Times New Roman"/>
+            </a:endParaRPr>
+          </a:p>
+        </p:txBody>
+      </p:sp>
+      <p:sp>
+        <p:nvSpPr>
+          <p:cNvPr id="4" name="PlaceHolder 5"/>
+          <p:cNvSpPr>
+            <a:spLocks noGrp="1"/>
+          </p:cNvSpPr>
+          <p:nvPr>
+            <p:ph type="dt" idx="3"/>
+          </p:nvPr>
+        </p:nvSpPr>
+        <p:spPr>
+          <a:xfrm>
+            <a:off x="628560" y="4767120"/>
+            <a:ext cx="2056320" cy="272880"/>
+          </a:xfrm>
+          <a:prstGeom prst="rect">
+            <a:avLst/>
+          </a:prstGeom>
+          <a:noFill/>
+          <a:ln w="0">
+            <a:noFill/>
+          </a:ln>
+        </p:spPr>
+        <p:txBody>
+          <a:bodyPr lIns="90000" rIns="90000" tIns="45000" bIns="45000" anchor="ctr">
+            <a:noAutofit/>
+          </a:bodyPr>
+          <a:lstStyle>
+            <a:lvl1pPr>
+              <a:defRPr b="0" lang="en-US" sz="1400" spc="-1" strike="noStrike">
+                <a:latin typeface="Times New Roman"/>
+              </a:defRPr>
+            </a:lvl1pPr>
+          </a:lstStyle>
+          <a:p>
+            <a:r>
+              <a:rPr b="0" lang="en-US" sz="1400" spc="-1" strike="noStrike">
+                <a:latin typeface="Times New Roman"/>
+              </a:rPr>
+              <a:t>&lt;date/time&gt;</a:t>
+            </a:r>
+            <a:endParaRPr b="0" lang="en-US" sz="1400" spc="-1" strike="noStrike">
+              <a:latin typeface="Times New Roman"/>
             </a:endParaRPr>
           </a:p>
         </p:txBody>
@@ -3324,7 +3306,7 @@
         <p:spPr>
           <a:xfrm>
             <a:off x="186840" y="178200"/>
-            <a:ext cx="8769960" cy="4757760"/>
+            <a:ext cx="8769600" cy="4757400"/>
           </a:xfrm>
           <a:prstGeom prst="roundRect">
             <a:avLst>
@@ -3362,7 +3344,7 @@
         <p:spPr>
           <a:xfrm>
             <a:off x="460080" y="4445640"/>
-            <a:ext cx="2998800" cy="269280"/>
+            <a:ext cx="2998440" cy="268920"/>
           </a:xfrm>
           <a:prstGeom prst="rect">
             <a:avLst/>
@@ -3428,7 +3410,7 @@
         <p:spPr>
           <a:xfrm>
             <a:off x="2423160" y="4446360"/>
-            <a:ext cx="290880" cy="290880"/>
+            <a:ext cx="290520" cy="290520"/>
           </a:xfrm>
           <a:prstGeom prst="rect">
             <a:avLst/>
@@ -3447,7 +3429,7 @@
         <p:spPr>
           <a:xfrm>
             <a:off x="460080" y="622080"/>
-            <a:ext cx="6925680" cy="3306600"/>
+            <a:ext cx="6925320" cy="3306240"/>
           </a:xfrm>
           <a:prstGeom prst="rect">
             <a:avLst/>
@@ -3503,7 +3485,7 @@
         <p:spPr>
           <a:xfrm>
             <a:off x="5753880" y="2557440"/>
-            <a:ext cx="4009680" cy="3133080"/>
+            <a:ext cx="4009320" cy="3132720"/>
           </a:xfrm>
           <a:prstGeom prst="rect">
             <a:avLst/>
@@ -3556,7 +3538,7 @@
         <p:spPr>
           <a:xfrm>
             <a:off x="5753880" y="2557440"/>
-            <a:ext cx="4009680" cy="3133080"/>
+            <a:ext cx="4009320" cy="3132720"/>
           </a:xfrm>
           <a:prstGeom prst="rect">
             <a:avLst/>
@@ -3575,7 +3557,7 @@
         <p:spPr>
           <a:xfrm>
             <a:off x="185760" y="831240"/>
-            <a:ext cx="899280" cy="899280"/>
+            <a:ext cx="898920" cy="898920"/>
           </a:xfrm>
           <a:prstGeom prst="ellipse">
             <a:avLst/>
@@ -3635,7 +3617,7 @@
         <p:spPr>
           <a:xfrm>
             <a:off x="185760" y="2381400"/>
-            <a:ext cx="899280" cy="887400"/>
+            <a:ext cx="898920" cy="887040"/>
           </a:xfrm>
           <a:prstGeom prst="ellipse">
             <a:avLst/>
@@ -3695,7 +3677,7 @@
         <p:spPr>
           <a:xfrm>
             <a:off x="185760" y="3860640"/>
-            <a:ext cx="899280" cy="899280"/>
+            <a:ext cx="898920" cy="898920"/>
           </a:xfrm>
           <a:prstGeom prst="ellipse">
             <a:avLst/>
@@ -3755,7 +3737,7 @@
         <p:spPr>
           <a:xfrm>
             <a:off x="967680" y="797040"/>
-            <a:ext cx="3764520" cy="550440"/>
+            <a:ext cx="3764160" cy="550080"/>
           </a:xfrm>
           <a:prstGeom prst="rect">
             <a:avLst/>
@@ -3817,7 +3799,7 @@
         <p:spPr>
           <a:xfrm>
             <a:off x="967680" y="1332720"/>
-            <a:ext cx="3764520" cy="789480"/>
+            <a:ext cx="3764160" cy="789120"/>
           </a:xfrm>
           <a:prstGeom prst="rect">
             <a:avLst/>
@@ -3879,7 +3861,7 @@
         <p:spPr>
           <a:xfrm>
             <a:off x="964080" y="2292480"/>
-            <a:ext cx="3764520" cy="550440"/>
+            <a:ext cx="3764160" cy="550080"/>
           </a:xfrm>
           <a:prstGeom prst="rect">
             <a:avLst/>
@@ -3931,7 +3913,7 @@
         <p:spPr>
           <a:xfrm>
             <a:off x="964080" y="2825280"/>
-            <a:ext cx="3764520" cy="843120"/>
+            <a:ext cx="3764160" cy="842760"/>
           </a:xfrm>
           <a:prstGeom prst="rect">
             <a:avLst/>
@@ -3993,7 +3975,7 @@
         <p:spPr>
           <a:xfrm>
             <a:off x="964080" y="3777840"/>
-            <a:ext cx="3764520" cy="550440"/>
+            <a:ext cx="3764160" cy="550080"/>
           </a:xfrm>
           <a:prstGeom prst="rect">
             <a:avLst/>
@@ -4045,7 +4027,7 @@
         <p:spPr>
           <a:xfrm>
             <a:off x="964080" y="4310640"/>
-            <a:ext cx="3764520" cy="794520"/>
+            <a:ext cx="3764160" cy="794160"/>
           </a:xfrm>
           <a:prstGeom prst="rect">
             <a:avLst/>
@@ -4107,7 +4089,7 @@
         <p:spPr>
           <a:xfrm>
             <a:off x="5084640" y="987840"/>
-            <a:ext cx="3687480" cy="3496680"/>
+            <a:ext cx="3687120" cy="3496320"/>
           </a:xfrm>
           <a:prstGeom prst="roundRect">
             <a:avLst>
@@ -4171,7 +4153,7 @@
         <p:spPr>
           <a:xfrm>
             <a:off x="8519760" y="4831560"/>
-            <a:ext cx="484560" cy="226800"/>
+            <a:ext cx="484200" cy="226800"/>
           </a:xfrm>
           <a:prstGeom prst="rect">
             <a:avLst/>
@@ -4223,7 +4205,7 @@
         <p:spPr>
           <a:xfrm>
             <a:off x="421200" y="228600"/>
-            <a:ext cx="8457840" cy="685440"/>
+            <a:ext cx="8457480" cy="685080"/>
           </a:xfrm>
           <a:prstGeom prst="rect">
             <a:avLst/>
@@ -4252,7 +4234,11 @@
             </a:pPr>
             <a:r>
               <a:rPr b="0" lang="en-US" sz="1800" spc="-1" strike="noStrike">
-                <a:latin typeface="Arial"/>
+                <a:solidFill>
+                  <a:srgbClr val="000000"/>
+                </a:solidFill>
+                <a:latin typeface="Arial"/>
+                <a:ea typeface="DejaVu Sans"/>
               </a:rPr>
               <a:t>TITLE</a:t>
             </a:r>
@@ -4301,7 +4287,7 @@
         <p:spPr>
           <a:xfrm>
             <a:off x="506520" y="1484640"/>
-            <a:ext cx="2556720" cy="2055240"/>
+            <a:ext cx="2556360" cy="2054880"/>
           </a:xfrm>
           <a:prstGeom prst="roundRect">
             <a:avLst>
@@ -4341,7 +4327,7 @@
         <p:spPr>
           <a:xfrm>
             <a:off x="624240" y="1616760"/>
-            <a:ext cx="2289600" cy="729000"/>
+            <a:ext cx="2289240" cy="728640"/>
           </a:xfrm>
           <a:prstGeom prst="rect">
             <a:avLst/>
@@ -4393,7 +4379,7 @@
         <p:spPr>
           <a:xfrm>
             <a:off x="624240" y="2400480"/>
-            <a:ext cx="2289600" cy="1162080"/>
+            <a:ext cx="2289240" cy="1161720"/>
           </a:xfrm>
           <a:prstGeom prst="rect">
             <a:avLst/>
@@ -4455,7 +4441,7 @@
         <p:spPr>
           <a:xfrm>
             <a:off x="3309120" y="2066040"/>
-            <a:ext cx="2556720" cy="2055240"/>
+            <a:ext cx="2556360" cy="2054880"/>
           </a:xfrm>
           <a:prstGeom prst="roundRect">
             <a:avLst>
@@ -4495,7 +4481,7 @@
         <p:spPr>
           <a:xfrm>
             <a:off x="3426840" y="2198160"/>
-            <a:ext cx="2289600" cy="729000"/>
+            <a:ext cx="2289240" cy="728640"/>
           </a:xfrm>
           <a:prstGeom prst="rect">
             <a:avLst/>
@@ -4547,7 +4533,7 @@
         <p:spPr>
           <a:xfrm>
             <a:off x="3426840" y="2981880"/>
-            <a:ext cx="2289600" cy="1162080"/>
+            <a:ext cx="2289240" cy="1161720"/>
           </a:xfrm>
           <a:prstGeom prst="rect">
             <a:avLst/>
@@ -4599,7 +4585,7 @@
         <p:spPr>
           <a:xfrm>
             <a:off x="6111720" y="2659320"/>
-            <a:ext cx="2556720" cy="2055240"/>
+            <a:ext cx="2556360" cy="2054880"/>
           </a:xfrm>
           <a:prstGeom prst="roundRect">
             <a:avLst>
@@ -4639,7 +4625,7 @@
         <p:spPr>
           <a:xfrm>
             <a:off x="6229440" y="2791440"/>
-            <a:ext cx="2289600" cy="729000"/>
+            <a:ext cx="2289240" cy="728640"/>
           </a:xfrm>
           <a:prstGeom prst="rect">
             <a:avLst/>
@@ -4674,7 +4660,7 @@
                 <a:latin typeface="Arial"/>
                 <a:ea typeface="DejaVu Sans"/>
               </a:rPr>
-              <a:t>SUBTITLE2</a:t>
+              <a:t>SUBTITLE3</a:t>
             </a:r>
             <a:endParaRPr b="0" lang="en-US" sz="1400" spc="-1" strike="noStrike">
               <a:latin typeface="Arial"/>
@@ -4691,7 +4677,7 @@
         <p:spPr>
           <a:xfrm>
             <a:off x="6229440" y="3574800"/>
-            <a:ext cx="2289600" cy="1162080"/>
+            <a:ext cx="2289240" cy="1161720"/>
           </a:xfrm>
           <a:prstGeom prst="rect">
             <a:avLst/>
@@ -4726,7 +4712,7 @@
                 <a:latin typeface="Arial"/>
                 <a:ea typeface="DejaVu Sans"/>
               </a:rPr>
-              <a:t>TEXT2</a:t>
+              <a:t>TEXT3</a:t>
             </a:r>
             <a:endParaRPr b="0" lang="en-US" sz="1100" spc="-1" strike="noStrike">
               <a:latin typeface="Arial"/>
@@ -4743,7 +4729,7 @@
         <p:spPr>
           <a:xfrm>
             <a:off x="8519760" y="4831560"/>
-            <a:ext cx="484560" cy="226800"/>
+            <a:ext cx="484200" cy="226800"/>
           </a:xfrm>
           <a:prstGeom prst="rect">
             <a:avLst/>
@@ -4795,7 +4781,7 @@
         <p:spPr>
           <a:xfrm>
             <a:off x="457200" y="228600"/>
-            <a:ext cx="8229240" cy="1142640"/>
+            <a:ext cx="8228880" cy="1142280"/>
           </a:xfrm>
           <a:prstGeom prst="rect">
             <a:avLst/>
@@ -4824,7 +4810,11 @@
             </a:pPr>
             <a:r>
               <a:rPr b="0" lang="en-US" sz="1800" spc="-1" strike="noStrike">
-                <a:latin typeface="Arial"/>
+                <a:solidFill>
+                  <a:srgbClr val="000000"/>
+                </a:solidFill>
+                <a:latin typeface="Arial"/>
+                <a:ea typeface="DejaVu Sans"/>
               </a:rPr>
               <a:t>TITLE</a:t>
             </a:r>
@@ -4873,7 +4863,7 @@
         <p:spPr>
           <a:xfrm>
             <a:off x="3601800" y="3271680"/>
-            <a:ext cx="5236200" cy="1320840"/>
+            <a:ext cx="5235840" cy="1320480"/>
           </a:xfrm>
           <a:prstGeom prst="roundRect">
             <a:avLst>
@@ -4911,7 +4901,7 @@
         <p:spPr>
           <a:xfrm>
             <a:off x="6308640" y="1028880"/>
-            <a:ext cx="2532960" cy="2056680"/>
+            <a:ext cx="2532600" cy="2056320"/>
           </a:xfrm>
           <a:prstGeom prst="roundRect">
             <a:avLst>
@@ -4949,7 +4939,7 @@
         <p:spPr>
           <a:xfrm>
             <a:off x="3604320" y="1014480"/>
-            <a:ext cx="2532960" cy="2056680"/>
+            <a:ext cx="2532600" cy="2056320"/>
           </a:xfrm>
           <a:prstGeom prst="roundRect">
             <a:avLst>
@@ -4987,7 +4977,7 @@
         <p:spPr>
           <a:xfrm>
             <a:off x="3696480" y="1059120"/>
-            <a:ext cx="2343240" cy="713520"/>
+            <a:ext cx="2342880" cy="713160"/>
           </a:xfrm>
           <a:prstGeom prst="rect">
             <a:avLst/>
@@ -5049,7 +5039,7 @@
         <p:spPr>
           <a:xfrm>
             <a:off x="3696480" y="1843560"/>
-            <a:ext cx="2343240" cy="1141920"/>
+            <a:ext cx="2342880" cy="1141560"/>
           </a:xfrm>
           <a:prstGeom prst="rect">
             <a:avLst/>
@@ -5111,7 +5101,7 @@
         <p:spPr>
           <a:xfrm>
             <a:off x="6400080" y="1059120"/>
-            <a:ext cx="2340000" cy="713520"/>
+            <a:ext cx="2339640" cy="713160"/>
           </a:xfrm>
           <a:prstGeom prst="rect">
             <a:avLst/>
@@ -5163,7 +5153,7 @@
         <p:spPr>
           <a:xfrm>
             <a:off x="6400080" y="1843560"/>
-            <a:ext cx="2340000" cy="1141920"/>
+            <a:ext cx="2339640" cy="1141560"/>
           </a:xfrm>
           <a:prstGeom prst="rect">
             <a:avLst/>
@@ -5225,7 +5215,7 @@
         <p:spPr>
           <a:xfrm>
             <a:off x="3696480" y="3362040"/>
-            <a:ext cx="5236200" cy="328680"/>
+            <a:ext cx="5235840" cy="328320"/>
           </a:xfrm>
           <a:prstGeom prst="rect">
             <a:avLst/>
@@ -5277,7 +5267,7 @@
         <p:spPr>
           <a:xfrm>
             <a:off x="3696480" y="3713400"/>
-            <a:ext cx="5146560" cy="713520"/>
+            <a:ext cx="5146200" cy="713160"/>
           </a:xfrm>
           <a:prstGeom prst="rect">
             <a:avLst/>
@@ -5339,7 +5329,7 @@
         <p:spPr>
           <a:xfrm>
             <a:off x="384840" y="1028880"/>
-            <a:ext cx="3002400" cy="3564000"/>
+            <a:ext cx="3002040" cy="3563640"/>
           </a:xfrm>
           <a:prstGeom prst="roundRect">
             <a:avLst>
@@ -5403,7 +5393,7 @@
         <p:spPr>
           <a:xfrm>
             <a:off x="8519760" y="4831560"/>
-            <a:ext cx="484560" cy="226800"/>
+            <a:ext cx="484200" cy="226800"/>
           </a:xfrm>
           <a:prstGeom prst="rect">
             <a:avLst/>
@@ -5455,7 +5445,7 @@
         <p:spPr>
           <a:xfrm>
             <a:off x="313200" y="228600"/>
-            <a:ext cx="8457840" cy="685440"/>
+            <a:ext cx="8457480" cy="685080"/>
           </a:xfrm>
           <a:prstGeom prst="rect">
             <a:avLst/>
@@ -5484,7 +5474,11 @@
             </a:pPr>
             <a:r>
               <a:rPr b="0" lang="en-US" sz="1800" spc="-1" strike="noStrike">
-                <a:latin typeface="Arial"/>
+                <a:solidFill>
+                  <a:srgbClr val="000000"/>
+                </a:solidFill>
+                <a:latin typeface="Arial"/>
+                <a:ea typeface="DejaVu Sans"/>
               </a:rPr>
               <a:t>TITLE</a:t>
             </a:r>
@@ -5537,7 +5531,7 @@
         <p:spPr>
           <a:xfrm>
             <a:off x="-877680" y="2245320"/>
-            <a:ext cx="4613040" cy="3604680"/>
+            <a:ext cx="4612680" cy="3604320"/>
           </a:xfrm>
           <a:prstGeom prst="rect">
             <a:avLst/>
@@ -5556,7 +5550,7 @@
         <p:spPr>
           <a:xfrm>
             <a:off x="4157640" y="631080"/>
-            <a:ext cx="899280" cy="899280"/>
+            <a:ext cx="898920" cy="898920"/>
           </a:xfrm>
           <a:prstGeom prst="ellipse">
             <a:avLst/>
@@ -5618,7 +5612,7 @@
         <p:spPr>
           <a:xfrm>
             <a:off x="4157640" y="2127600"/>
-            <a:ext cx="899280" cy="887400"/>
+            <a:ext cx="898920" cy="887040"/>
           </a:xfrm>
           <a:prstGeom prst="ellipse">
             <a:avLst/>
@@ -5680,7 +5674,7 @@
         <p:spPr>
           <a:xfrm>
             <a:off x="4157640" y="3612240"/>
-            <a:ext cx="899280" cy="899280"/>
+            <a:ext cx="898920" cy="898920"/>
           </a:xfrm>
           <a:prstGeom prst="ellipse">
             <a:avLst/>
@@ -5742,7 +5736,7 @@
         <p:spPr>
           <a:xfrm>
             <a:off x="5146560" y="489600"/>
-            <a:ext cx="3578760" cy="550440"/>
+            <a:ext cx="3578400" cy="550080"/>
           </a:xfrm>
           <a:prstGeom prst="rect">
             <a:avLst/>
@@ -5804,7 +5798,7 @@
         <p:spPr>
           <a:xfrm>
             <a:off x="5146560" y="1025280"/>
-            <a:ext cx="3578760" cy="789480"/>
+            <a:ext cx="3578400" cy="789120"/>
           </a:xfrm>
           <a:prstGeom prst="rect">
             <a:avLst/>
@@ -5866,7 +5860,7 @@
         <p:spPr>
           <a:xfrm>
             <a:off x="5142960" y="1985400"/>
-            <a:ext cx="3578760" cy="550440"/>
+            <a:ext cx="3578400" cy="550080"/>
           </a:xfrm>
           <a:prstGeom prst="rect">
             <a:avLst/>
@@ -5918,7 +5912,7 @@
         <p:spPr>
           <a:xfrm>
             <a:off x="5142960" y="2517840"/>
-            <a:ext cx="3578760" cy="843120"/>
+            <a:ext cx="3578400" cy="842760"/>
           </a:xfrm>
           <a:prstGeom prst="rect">
             <a:avLst/>
@@ -5980,7 +5974,7 @@
         <p:spPr>
           <a:xfrm>
             <a:off x="5142960" y="3470760"/>
-            <a:ext cx="3578760" cy="550440"/>
+            <a:ext cx="3578400" cy="550080"/>
           </a:xfrm>
           <a:prstGeom prst="rect">
             <a:avLst/>
@@ -6032,7 +6026,7 @@
         <p:spPr>
           <a:xfrm>
             <a:off x="5142960" y="4003560"/>
-            <a:ext cx="3578760" cy="794520"/>
+            <a:ext cx="3578400" cy="794160"/>
           </a:xfrm>
           <a:prstGeom prst="rect">
             <a:avLst/>
@@ -6094,7 +6088,7 @@
         <p:spPr>
           <a:xfrm>
             <a:off x="8519760" y="4831560"/>
-            <a:ext cx="484560" cy="226800"/>
+            <a:ext cx="484200" cy="226800"/>
           </a:xfrm>
           <a:prstGeom prst="rect">
             <a:avLst/>
@@ -6146,7 +6140,7 @@
         <p:spPr>
           <a:xfrm>
             <a:off x="264600" y="228600"/>
-            <a:ext cx="3657240" cy="2016360"/>
+            <a:ext cx="3656880" cy="2016000"/>
           </a:xfrm>
           <a:prstGeom prst="rect">
             <a:avLst/>
@@ -6175,7 +6169,11 @@
             </a:pPr>
             <a:r>
               <a:rPr b="0" lang="en-US" sz="1800" spc="-1" strike="noStrike">
-                <a:latin typeface="Arial"/>
+                <a:solidFill>
+                  <a:srgbClr val="000000"/>
+                </a:solidFill>
+                <a:latin typeface="Arial"/>
+                <a:ea typeface="DejaVu Sans"/>
               </a:rPr>
               <a:t>TITLE</a:t>
             </a:r>
@@ -6224,7 +6222,7 @@
         <p:spPr>
           <a:xfrm>
             <a:off x="4238640" y="831240"/>
-            <a:ext cx="899280" cy="899280"/>
+            <a:ext cx="898920" cy="898920"/>
           </a:xfrm>
           <a:prstGeom prst="ellipse">
             <a:avLst/>
@@ -6284,7 +6282,7 @@
         <p:spPr>
           <a:xfrm>
             <a:off x="4238640" y="2243880"/>
-            <a:ext cx="899280" cy="887400"/>
+            <a:ext cx="898920" cy="887040"/>
           </a:xfrm>
           <a:prstGeom prst="ellipse">
             <a:avLst/>
@@ -6344,7 +6342,7 @@
         <p:spPr>
           <a:xfrm>
             <a:off x="4238640" y="3667320"/>
-            <a:ext cx="899280" cy="899280"/>
+            <a:ext cx="898920" cy="898920"/>
           </a:xfrm>
           <a:prstGeom prst="ellipse">
             <a:avLst/>
@@ -6404,7 +6402,7 @@
         <p:spPr>
           <a:xfrm>
             <a:off x="5020200" y="797040"/>
-            <a:ext cx="3764520" cy="550440"/>
+            <a:ext cx="3764160" cy="550080"/>
           </a:xfrm>
           <a:prstGeom prst="rect">
             <a:avLst/>
@@ -6466,7 +6464,7 @@
         <p:spPr>
           <a:xfrm>
             <a:off x="5020200" y="1332720"/>
-            <a:ext cx="3764520" cy="789480"/>
+            <a:ext cx="3764160" cy="789120"/>
           </a:xfrm>
           <a:prstGeom prst="rect">
             <a:avLst/>
@@ -6528,7 +6526,7 @@
         <p:spPr>
           <a:xfrm>
             <a:off x="5016600" y="2155320"/>
-            <a:ext cx="3764520" cy="550440"/>
+            <a:ext cx="3764160" cy="550080"/>
           </a:xfrm>
           <a:prstGeom prst="rect">
             <a:avLst/>
@@ -6580,7 +6578,7 @@
         <p:spPr>
           <a:xfrm>
             <a:off x="5016600" y="2687760"/>
-            <a:ext cx="3764520" cy="843120"/>
+            <a:ext cx="3764160" cy="842760"/>
           </a:xfrm>
           <a:prstGeom prst="rect">
             <a:avLst/>
@@ -6642,7 +6640,7 @@
         <p:spPr>
           <a:xfrm>
             <a:off x="5016600" y="3584880"/>
-            <a:ext cx="3764520" cy="550440"/>
+            <a:ext cx="3764160" cy="550080"/>
           </a:xfrm>
           <a:prstGeom prst="rect">
             <a:avLst/>
@@ -6694,7 +6692,7 @@
         <p:spPr>
           <a:xfrm>
             <a:off x="5016600" y="4117320"/>
-            <a:ext cx="3764520" cy="794520"/>
+            <a:ext cx="3764160" cy="794160"/>
           </a:xfrm>
           <a:prstGeom prst="rect">
             <a:avLst/>
@@ -6756,7 +6754,7 @@
         <p:spPr>
           <a:xfrm>
             <a:off x="384840" y="987840"/>
-            <a:ext cx="3687480" cy="3496680"/>
+            <a:ext cx="3687120" cy="3496320"/>
           </a:xfrm>
           <a:prstGeom prst="roundRect">
             <a:avLst>
@@ -6820,7 +6818,7 @@
         <p:spPr>
           <a:xfrm>
             <a:off x="8519760" y="4831560"/>
-            <a:ext cx="484560" cy="226800"/>
+            <a:ext cx="484200" cy="226800"/>
           </a:xfrm>
           <a:prstGeom prst="rect">
             <a:avLst/>
@@ -6872,7 +6870,7 @@
         <p:spPr>
           <a:xfrm>
             <a:off x="300600" y="228600"/>
-            <a:ext cx="8614440" cy="685440"/>
+            <a:ext cx="8614080" cy="685080"/>
           </a:xfrm>
           <a:prstGeom prst="rect">
             <a:avLst/>
@@ -6901,7 +6899,11 @@
             </a:pPr>
             <a:r>
               <a:rPr b="0" lang="en-US" sz="1800" spc="-1" strike="noStrike">
-                <a:latin typeface="Arial"/>
+                <a:solidFill>
+                  <a:srgbClr val="000000"/>
+                </a:solidFill>
+                <a:latin typeface="Arial"/>
+                <a:ea typeface="DejaVu Sans"/>
               </a:rPr>
               <a:t>TITLE</a:t>
             </a:r>
@@ -6950,7 +6952,7 @@
         <p:spPr>
           <a:xfrm>
             <a:off x="0" y="3075480"/>
-            <a:ext cx="9143280" cy="2494800"/>
+            <a:ext cx="9142920" cy="2494440"/>
           </a:xfrm>
           <a:prstGeom prst="roundRect">
             <a:avLst>
@@ -7014,7 +7016,7 @@
         <p:spPr>
           <a:xfrm>
             <a:off x="474840" y="841680"/>
-            <a:ext cx="2556720" cy="2055240"/>
+            <a:ext cx="2556360" cy="2054880"/>
           </a:xfrm>
           <a:prstGeom prst="roundRect">
             <a:avLst>
@@ -7054,7 +7056,7 @@
         <p:spPr>
           <a:xfrm>
             <a:off x="592920" y="973800"/>
-            <a:ext cx="2289600" cy="729000"/>
+            <a:ext cx="2289240" cy="728640"/>
           </a:xfrm>
           <a:prstGeom prst="rect">
             <a:avLst/>
@@ -7106,7 +7108,7 @@
         <p:spPr>
           <a:xfrm>
             <a:off x="592920" y="1757520"/>
-            <a:ext cx="2289600" cy="1162080"/>
+            <a:ext cx="2289240" cy="1161720"/>
           </a:xfrm>
           <a:prstGeom prst="rect">
             <a:avLst/>
@@ -7168,7 +7170,7 @@
         <p:spPr>
           <a:xfrm>
             <a:off x="3309120" y="841680"/>
-            <a:ext cx="2556720" cy="2055240"/>
+            <a:ext cx="2556360" cy="2054880"/>
           </a:xfrm>
           <a:prstGeom prst="roundRect">
             <a:avLst>
@@ -7208,7 +7210,7 @@
         <p:spPr>
           <a:xfrm>
             <a:off x="3426840" y="973800"/>
-            <a:ext cx="2289600" cy="729000"/>
+            <a:ext cx="2289240" cy="728640"/>
           </a:xfrm>
           <a:prstGeom prst="rect">
             <a:avLst/>
@@ -7260,7 +7262,7 @@
         <p:spPr>
           <a:xfrm>
             <a:off x="3426840" y="1757520"/>
-            <a:ext cx="2289600" cy="1162080"/>
+            <a:ext cx="2289240" cy="1161720"/>
           </a:xfrm>
           <a:prstGeom prst="rect">
             <a:avLst/>
@@ -7312,7 +7314,7 @@
         <p:spPr>
           <a:xfrm>
             <a:off x="6143040" y="841680"/>
-            <a:ext cx="2556720" cy="2055240"/>
+            <a:ext cx="2556360" cy="2054880"/>
           </a:xfrm>
           <a:prstGeom prst="roundRect">
             <a:avLst>
@@ -7352,7 +7354,7 @@
         <p:spPr>
           <a:xfrm>
             <a:off x="6260760" y="973800"/>
-            <a:ext cx="2289600" cy="729000"/>
+            <a:ext cx="2289240" cy="728640"/>
           </a:xfrm>
           <a:prstGeom prst="rect">
             <a:avLst/>
@@ -7404,7 +7406,7 @@
         <p:spPr>
           <a:xfrm>
             <a:off x="6260760" y="1757520"/>
-            <a:ext cx="2289600" cy="1162080"/>
+            <a:ext cx="2289240" cy="1161720"/>
           </a:xfrm>
           <a:prstGeom prst="rect">
             <a:avLst/>
@@ -7456,7 +7458,7 @@
         <p:spPr>
           <a:xfrm>
             <a:off x="8519760" y="4831560"/>
-            <a:ext cx="484560" cy="226800"/>
+            <a:ext cx="484200" cy="226800"/>
           </a:xfrm>
           <a:prstGeom prst="rect">
             <a:avLst/>
@@ -7508,7 +7510,7 @@
         <p:spPr>
           <a:xfrm>
             <a:off x="457200" y="349200"/>
-            <a:ext cx="8457840" cy="1022040"/>
+            <a:ext cx="8457480" cy="1021680"/>
           </a:xfrm>
           <a:prstGeom prst="rect">
             <a:avLst/>
@@ -7537,7 +7539,11 @@
             </a:pPr>
             <a:r>
               <a:rPr b="0" lang="en-US" sz="1800" spc="-1" strike="noStrike">
-                <a:latin typeface="Arial"/>
+                <a:solidFill>
+                  <a:srgbClr val="000000"/>
+                </a:solidFill>
+                <a:latin typeface="Arial"/>
+                <a:ea typeface="DejaVu Sans"/>
               </a:rPr>
               <a:t>TITLE</a:t>
             </a:r>
@@ -7593,7 +7599,7 @@
         <p:spPr>
           <a:xfrm>
             <a:off x="5014080" y="250200"/>
-            <a:ext cx="3820320" cy="4624920"/>
+            <a:ext cx="3819960" cy="4624560"/>
           </a:xfrm>
           <a:prstGeom prst="roundRect">
             <a:avLst>
@@ -7659,7 +7665,7 @@
         <p:spPr>
           <a:xfrm>
             <a:off x="329400" y="250200"/>
-            <a:ext cx="4424760" cy="4624920"/>
+            <a:ext cx="4424400" cy="4624560"/>
           </a:xfrm>
           <a:prstGeom prst="roundRect">
             <a:avLst>
@@ -7697,7 +7703,7 @@
         <p:spPr>
           <a:xfrm>
             <a:off x="581760" y="828720"/>
-            <a:ext cx="3901680" cy="550440"/>
+            <a:ext cx="3901320" cy="550080"/>
           </a:xfrm>
           <a:prstGeom prst="rect">
             <a:avLst/>
@@ -7759,7 +7765,7 @@
         <p:spPr>
           <a:xfrm>
             <a:off x="581760" y="1364400"/>
-            <a:ext cx="3901680" cy="789480"/>
+            <a:ext cx="3901320" cy="789120"/>
           </a:xfrm>
           <a:prstGeom prst="rect">
             <a:avLst/>
@@ -7821,7 +7827,7 @@
         <p:spPr>
           <a:xfrm>
             <a:off x="578160" y="2154600"/>
-            <a:ext cx="3901680" cy="550440"/>
+            <a:ext cx="3901320" cy="550080"/>
           </a:xfrm>
           <a:prstGeom prst="rect">
             <a:avLst/>
@@ -7873,7 +7879,7 @@
         <p:spPr>
           <a:xfrm>
             <a:off x="578160" y="2687040"/>
-            <a:ext cx="3901680" cy="843120"/>
+            <a:ext cx="3901320" cy="842760"/>
           </a:xfrm>
           <a:prstGeom prst="rect">
             <a:avLst/>
@@ -7935,7 +7941,7 @@
         <p:spPr>
           <a:xfrm>
             <a:off x="578160" y="3482280"/>
-            <a:ext cx="3901680" cy="550440"/>
+            <a:ext cx="3901320" cy="550080"/>
           </a:xfrm>
           <a:prstGeom prst="rect">
             <a:avLst/>
@@ -7987,7 +7993,7 @@
         <p:spPr>
           <a:xfrm>
             <a:off x="578160" y="4015080"/>
-            <a:ext cx="3901680" cy="794520"/>
+            <a:ext cx="3901320" cy="794160"/>
           </a:xfrm>
           <a:prstGeom prst="rect">
             <a:avLst/>
@@ -8049,7 +8055,7 @@
         <p:spPr>
           <a:xfrm>
             <a:off x="8519760" y="4831560"/>
-            <a:ext cx="484560" cy="226800"/>
+            <a:ext cx="484200" cy="226800"/>
           </a:xfrm>
           <a:prstGeom prst="rect">
             <a:avLst/>
@@ -8101,7 +8107,7 @@
         <p:spPr>
           <a:xfrm>
             <a:off x="493200" y="300600"/>
-            <a:ext cx="4078440" cy="842040"/>
+            <a:ext cx="4078080" cy="841680"/>
           </a:xfrm>
           <a:prstGeom prst="rect">
             <a:avLst/>
@@ -8130,7 +8136,11 @@
             </a:pPr>
             <a:r>
               <a:rPr b="0" lang="en-US" sz="1800" spc="-1" strike="noStrike">
-                <a:latin typeface="Arial"/>
+                <a:solidFill>
+                  <a:srgbClr val="000000"/>
+                </a:solidFill>
+                <a:latin typeface="Arial"/>
+                <a:ea typeface="DejaVu Sans"/>
               </a:rPr>
               <a:t>TITLE</a:t>
             </a:r>
@@ -8179,7 +8189,7 @@
         <p:spPr>
           <a:xfrm>
             <a:off x="186840" y="178200"/>
-            <a:ext cx="8769960" cy="4757760"/>
+            <a:ext cx="8769600" cy="4757400"/>
           </a:xfrm>
           <a:prstGeom prst="roundRect">
             <a:avLst>
@@ -8217,7 +8227,7 @@
         <p:spPr>
           <a:xfrm>
             <a:off x="1640880" y="4489920"/>
-            <a:ext cx="2998800" cy="269280"/>
+            <a:ext cx="2998440" cy="268920"/>
           </a:xfrm>
           <a:prstGeom prst="rect">
             <a:avLst/>
@@ -8279,7 +8289,7 @@
         <p:spPr>
           <a:xfrm>
             <a:off x="867240" y="3488040"/>
-            <a:ext cx="256680" cy="256680"/>
+            <a:ext cx="256320" cy="256320"/>
           </a:xfrm>
           <a:prstGeom prst="ellipse">
             <a:avLst/>
@@ -8314,7 +8324,7 @@
         <p:spPr>
           <a:xfrm>
             <a:off x="351000" y="3691440"/>
-            <a:ext cx="1289160" cy="1133280"/>
+            <a:ext cx="1288800" cy="1132920"/>
           </a:xfrm>
           <a:prstGeom prst="rect">
             <a:avLst/>
@@ -8333,7 +8343,7 @@
         <p:spPr>
           <a:xfrm>
             <a:off x="460080" y="622080"/>
-            <a:ext cx="6925680" cy="3306600"/>
+            <a:ext cx="6925320" cy="3306240"/>
           </a:xfrm>
           <a:prstGeom prst="rect">
             <a:avLst/>
@@ -8389,7 +8399,7 @@
         <p:spPr>
           <a:xfrm>
             <a:off x="5753880" y="2557440"/>
-            <a:ext cx="4009680" cy="3133080"/>
+            <a:ext cx="4009320" cy="3132720"/>
           </a:xfrm>
           <a:prstGeom prst="rect">
             <a:avLst/>
